--- a/assets/powerpoints/module-vetements/C2-demander-et-donner-un-avis.pptx
+++ b/assets/powerpoints/module-vetements/C2-demander-et-donner-un-avis.pptx
@@ -10737,7 +10737,25 @@
                 </a:solidFill>
                 <a:latin typeface="Verdana"/>
               </a:rPr>
-              <a:t>Le petit &lt;b&gt;en&lt;/b&gt; remplace « de ce manteau ». On peut aussi dire « Comment tu trouves ça ? » ou, plus formel, « Qu'en pensez-vous ? ». La formule avec « en » est de loin la plus fréquente à l'oral.</a:t>
+              <a:t>Le petit </a:t>
+            </a:r>
+            <a:r>
+              <a:rPr sz="2000" b="1" i="0">
+                <a:solidFill>
+                  <a:srgbClr val="4B4F52"/>
+                </a:solidFill>
+                <a:latin typeface="Verdana"/>
+              </a:rPr>
+              <a:t>en</a:t>
+            </a:r>
+            <a:r>
+              <a:rPr sz="2000" b="0" i="0">
+                <a:solidFill>
+                  <a:srgbClr val="4B4F52"/>
+                </a:solidFill>
+                <a:latin typeface="Verdana"/>
+              </a:rPr>
+              <a:t> remplace « de ce manteau ». On peut aussi dire « Comment tu trouves ça ? » ou, plus formel, « Qu'en pensez-vous ? ». La formule avec « en » est de loin la plus fréquente à l'oral.</a:t>
             </a:r>
           </a:p>
         </p:txBody>
